--- a/documents/deck/sample_polished.pptx
+++ b/documents/deck/sample_polished.pptx
@@ -1408,7 +1408,7 @@
                 <a:ea typeface="Calibri" pitchFamily="34" charset="-122"/>
                 <a:cs typeface="Calibri" pitchFamily="34" charset="-120"/>
               </a:rPr>
-              <a:t>AI-powered insights untuk tim sales &amp; customer success</a:t>
+              <a:t>Insights yang dapat ditindaklanjuti, dalam hitungan jam.</a:t>
             </a:r>
             <a:endParaRPr lang="en-US" sz="1700" dirty="0"/>
           </a:p>
@@ -1564,7 +1564,7 @@
                 <a:ea typeface="Calibri" pitchFamily="34" charset="-122"/>
                 <a:cs typeface="Calibri" pitchFamily="34" charset="-120"/>
               </a:rPr>
-              <a:t>14 Mei 2026</a:t>
+              <a:t>15 Mei 2026</a:t>
             </a:r>
             <a:endParaRPr lang="en-US" sz="1600" dirty="0"/>
           </a:p>
@@ -1657,34 +1657,9 @@
           <a:chExt cx="0" cy="0"/>
         </a:xfrm>
       </p:grpSpPr>
-      <p:sp>
-        <p:nvSpPr>
-          <p:cNvPr id="2" name="Shape 0"/>
-          <p:cNvSpPr/>
-          <p:nvPr/>
-        </p:nvSpPr>
-        <p:spPr>
-          <a:xfrm>
-            <a:off x="0" y="0"/>
-            <a:ext cx="12191695" cy="54864"/>
-          </a:xfrm>
-          <a:prstGeom prst="rect">
-            <a:avLst/>
-          </a:prstGeom>
-          <a:solidFill>
-            <a:srgbClr val="2563EB"/>
-          </a:solidFill>
-          <a:ln w="12700">
-            <a:solidFill>
-              <a:srgbClr val="2563EB"/>
-            </a:solidFill>
-            <a:prstDash val="solid"/>
-          </a:ln>
-        </p:spPr>
-      </p:sp>
       <p:pic>
         <p:nvPicPr>
-          <p:cNvPr id="3" name="Image 0" descr="/Users/muhammadrayandika/repo/document-agent/brand/logo.png">    </p:cNvPr>
+          <p:cNvPr id="2" name="Image 0" descr="tmp/deck_images/slide_01.png">    </p:cNvPr>
           <p:cNvPicPr>
             <a:picLocks noChangeAspect="1"/>
           </p:cNvPicPr>
@@ -1692,566 +1667,19 @@
         </p:nvPicPr>
         <p:blipFill>
           <a:blip r:embed="rId1"/>
-          <a:stretch>
-            <a:fillRect/>
-          </a:stretch>
+          <a:srcRect l="0" r="0" t="0" b="0"/>
+          <a:stretch/>
         </p:blipFill>
         <p:spPr>
           <a:xfrm>
-            <a:off x="502920" y="256032"/>
-            <a:ext cx="411480" cy="411480"/>
+            <a:off x="0" y="0"/>
+            <a:ext cx="12191695" cy="6858000"/>
           </a:xfrm>
           <a:prstGeom prst="rect">
             <a:avLst/>
           </a:prstGeom>
         </p:spPr>
       </p:pic>
-      <p:sp>
-        <p:nvSpPr>
-          <p:cNvPr id="4" name="Text 1"/>
-          <p:cNvSpPr/>
-          <p:nvPr/>
-        </p:nvSpPr>
-        <p:spPr>
-          <a:xfrm>
-            <a:off x="960120" y="292608"/>
-            <a:ext cx="2743200" cy="365760"/>
-          </a:xfrm>
-          <a:prstGeom prst="rect">
-            <a:avLst/>
-          </a:prstGeom>
-          <a:noFill/>
-          <a:ln/>
-        </p:spPr>
-        <p:txBody>
-          <a:bodyPr wrap="square" rtlCol="0" anchor="ctr"/>
-          <a:lstStyle/>
-          <a:p>
-            <a:pPr indent="0" marL="0">
-              <a:buNone/>
-            </a:pPr>
-            <a:r>
-              <a:rPr lang="en-US" sz="1200" b="1" dirty="0">
-                <a:solidFill>
-                  <a:srgbClr val="141B2E"/>
-                </a:solidFill>
-                <a:latin typeface="Calibri" pitchFamily="34" charset="0"/>
-                <a:ea typeface="Calibri" pitchFamily="34" charset="-122"/>
-                <a:cs typeface="Calibri" pitchFamily="34" charset="-120"/>
-              </a:rPr>
-              <a:t>OpenCraft</a:t>
-            </a:r>
-            <a:endParaRPr lang="en-US" sz="1200" dirty="0"/>
-          </a:p>
-        </p:txBody>
-      </p:sp>
-      <p:sp>
-        <p:nvSpPr>
-          <p:cNvPr id="5" name="Text 2"/>
-          <p:cNvSpPr/>
-          <p:nvPr/>
-        </p:nvSpPr>
-        <p:spPr>
-          <a:xfrm>
-            <a:off x="10820095" y="292608"/>
-            <a:ext cx="914400" cy="365760"/>
-          </a:xfrm>
-          <a:prstGeom prst="rect">
-            <a:avLst/>
-          </a:prstGeom>
-          <a:noFill/>
-          <a:ln/>
-        </p:spPr>
-        <p:txBody>
-          <a:bodyPr wrap="square" rtlCol="0" anchor="ctr"/>
-          <a:lstStyle/>
-          <a:p>
-            <a:pPr algn="r" indent="0" marL="0">
-              <a:buNone/>
-            </a:pPr>
-            <a:r>
-              <a:rPr lang="en-US" sz="1000" dirty="0">
-                <a:solidFill>
-                  <a:srgbClr val="B7BFCC"/>
-                </a:solidFill>
-                <a:latin typeface="Calibri" pitchFamily="34" charset="0"/>
-                <a:ea typeface="Calibri" pitchFamily="34" charset="-122"/>
-                <a:cs typeface="Calibri" pitchFamily="34" charset="-120"/>
-              </a:rPr>
-              <a:t>03 / 05</a:t>
-            </a:r>
-            <a:endParaRPr lang="en-US" sz="1000" dirty="0"/>
-          </a:p>
-        </p:txBody>
-      </p:sp>
-      <p:sp>
-        <p:nvSpPr>
-          <p:cNvPr id="6" name="Text 3"/>
-          <p:cNvSpPr/>
-          <p:nvPr/>
-        </p:nvSpPr>
-        <p:spPr>
-          <a:xfrm>
-            <a:off x="548640" y="6446520"/>
-            <a:ext cx="11094415" cy="274320"/>
-          </a:xfrm>
-          <a:prstGeom prst="rect">
-            <a:avLst/>
-          </a:prstGeom>
-          <a:noFill/>
-          <a:ln/>
-        </p:spPr>
-        <p:txBody>
-          <a:bodyPr wrap="square" rtlCol="0" anchor="ctr"/>
-          <a:lstStyle/>
-          <a:p>
-            <a:pPr indent="0" marL="0">
-              <a:buNone/>
-            </a:pPr>
-            <a:r>
-              <a:rPr lang="en-US" sz="800" spc="200" kern="0" dirty="0">
-                <a:solidFill>
-                  <a:srgbClr val="B7BFCC"/>
-                </a:solidFill>
-                <a:latin typeface="Calibri" pitchFamily="34" charset="0"/>
-                <a:ea typeface="Calibri" pitchFamily="34" charset="-122"/>
-                <a:cs typeface="Calibri" pitchFamily="34" charset="-120"/>
-              </a:rPr>
-              <a:t>OpenCraft · AI Transformation Company</a:t>
-            </a:r>
-            <a:endParaRPr lang="en-US" sz="800" dirty="0"/>
-          </a:p>
-        </p:txBody>
-      </p:sp>
-      <p:sp>
-        <p:nvSpPr>
-          <p:cNvPr id="7" name="Text 4"/>
-          <p:cNvSpPr/>
-          <p:nvPr/>
-        </p:nvSpPr>
-        <p:spPr>
-          <a:xfrm>
-            <a:off x="548640" y="914400"/>
-            <a:ext cx="11094415" cy="640080"/>
-          </a:xfrm>
-          <a:prstGeom prst="rect">
-            <a:avLst/>
-          </a:prstGeom>
-          <a:noFill/>
-          <a:ln/>
-        </p:spPr>
-        <p:txBody>
-          <a:bodyPr wrap="square" rtlCol="0" anchor="ctr"/>
-          <a:lstStyle/>
-          <a:p>
-            <a:pPr indent="0" marL="0">
-              <a:buNone/>
-            </a:pPr>
-            <a:r>
-              <a:rPr lang="en-US" sz="3000" b="1" dirty="0">
-                <a:solidFill>
-                  <a:srgbClr val="141B2E"/>
-                </a:solidFill>
-                <a:latin typeface="Calibri" pitchFamily="34" charset="0"/>
-                <a:ea typeface="Calibri" pitchFamily="34" charset="-122"/>
-                <a:cs typeface="Calibri" pitchFamily="34" charset="-120"/>
-              </a:rPr>
-              <a:t>Tiga pilar transformasi AI OpenCraft</a:t>
-            </a:r>
-            <a:endParaRPr lang="en-US" sz="3000" dirty="0"/>
-          </a:p>
-        </p:txBody>
-      </p:sp>
-      <p:sp>
-        <p:nvSpPr>
-          <p:cNvPr id="8" name="Text 5"/>
-          <p:cNvSpPr/>
-          <p:nvPr/>
-        </p:nvSpPr>
-        <p:spPr>
-          <a:xfrm>
-            <a:off x="548640" y="1691640"/>
-            <a:ext cx="11094415" cy="457200"/>
-          </a:xfrm>
-          <a:prstGeom prst="rect">
-            <a:avLst/>
-          </a:prstGeom>
-          <a:noFill/>
-          <a:ln/>
-        </p:spPr>
-        <p:txBody>
-          <a:bodyPr wrap="square" rtlCol="0" anchor="ctr"/>
-          <a:lstStyle/>
-          <a:p>
-            <a:pPr indent="0" marL="0">
-              <a:buNone/>
-            </a:pPr>
-            <a:r>
-              <a:rPr lang="en-US" sz="1400" dirty="0">
-                <a:solidFill>
-                  <a:srgbClr val="6E7990"/>
-                </a:solidFill>
-                <a:latin typeface="Calibri" pitchFamily="34" charset="0"/>
-                <a:ea typeface="Calibri" pitchFamily="34" charset="-122"/>
-                <a:cs typeface="Calibri" pitchFamily="34" charset="-120"/>
-              </a:rPr>
-              <a:t>Mulai dari strategi, eksekusi, hingga adopsi — sebagai satu sistem.</a:t>
-            </a:r>
-            <a:endParaRPr lang="en-US" sz="1400" dirty="0"/>
-          </a:p>
-        </p:txBody>
-      </p:sp>
-      <p:sp>
-        <p:nvSpPr>
-          <p:cNvPr id="9" name="Text 6"/>
-          <p:cNvSpPr/>
-          <p:nvPr/>
-        </p:nvSpPr>
-        <p:spPr>
-          <a:xfrm>
-            <a:off x="548640" y="2560320"/>
-            <a:ext cx="822960" cy="1005840"/>
-          </a:xfrm>
-          <a:prstGeom prst="rect">
-            <a:avLst/>
-          </a:prstGeom>
-          <a:noFill/>
-          <a:ln/>
-        </p:spPr>
-        <p:txBody>
-          <a:bodyPr wrap="square" rtlCol="0" anchor="t"/>
-          <a:lstStyle/>
-          <a:p>
-            <a:pPr indent="0" marL="0">
-              <a:buNone/>
-            </a:pPr>
-            <a:r>
-              <a:rPr lang="en-US" sz="2200" b="1" dirty="0">
-                <a:solidFill>
-                  <a:srgbClr val="2563EB"/>
-                </a:solidFill>
-                <a:latin typeface="Calibri" pitchFamily="34" charset="0"/>
-                <a:ea typeface="Calibri" pitchFamily="34" charset="-122"/>
-                <a:cs typeface="Calibri" pitchFamily="34" charset="-120"/>
-              </a:rPr>
-              <a:t>01</a:t>
-            </a:r>
-            <a:endParaRPr lang="en-US" sz="2200" dirty="0"/>
-          </a:p>
-        </p:txBody>
-      </p:sp>
-      <p:sp>
-        <p:nvSpPr>
-          <p:cNvPr id="10" name="Text 7"/>
-          <p:cNvSpPr/>
-          <p:nvPr/>
-        </p:nvSpPr>
-        <p:spPr>
-          <a:xfrm>
-            <a:off x="1463040" y="2560320"/>
-            <a:ext cx="10180015" cy="365760"/>
-          </a:xfrm>
-          <a:prstGeom prst="rect">
-            <a:avLst/>
-          </a:prstGeom>
-          <a:noFill/>
-          <a:ln/>
-        </p:spPr>
-        <p:txBody>
-          <a:bodyPr wrap="square" rtlCol="0" anchor="t"/>
-          <a:lstStyle/>
-          <a:p>
-            <a:pPr indent="0" marL="0">
-              <a:buNone/>
-            </a:pPr>
-            <a:r>
-              <a:rPr lang="en-US" sz="1600" b="1" dirty="0">
-                <a:solidFill>
-                  <a:srgbClr val="141B2E"/>
-                </a:solidFill>
-                <a:latin typeface="Calibri" pitchFamily="34" charset="0"/>
-                <a:ea typeface="Calibri" pitchFamily="34" charset="-122"/>
-                <a:cs typeface="Calibri" pitchFamily="34" charset="-120"/>
-              </a:rPr>
-              <a:t>AI Strategy</a:t>
-            </a:r>
-            <a:endParaRPr lang="en-US" sz="1600" dirty="0"/>
-          </a:p>
-        </p:txBody>
-      </p:sp>
-      <p:sp>
-        <p:nvSpPr>
-          <p:cNvPr id="11" name="Text 8"/>
-          <p:cNvSpPr/>
-          <p:nvPr/>
-        </p:nvSpPr>
-        <p:spPr>
-          <a:xfrm>
-            <a:off x="1463040" y="2926080"/>
-            <a:ext cx="10180015" cy="548640"/>
-          </a:xfrm>
-          <a:prstGeom prst="rect">
-            <a:avLst/>
-          </a:prstGeom>
-          <a:noFill/>
-          <a:ln/>
-        </p:spPr>
-        <p:txBody>
-          <a:bodyPr wrap="square" rtlCol="0" anchor="t"/>
-          <a:lstStyle/>
-          <a:p>
-            <a:pPr indent="0" marL="0">
-              <a:buNone/>
-            </a:pPr>
-            <a:r>
-              <a:rPr lang="en-US" sz="1200" dirty="0">
-                <a:solidFill>
-                  <a:srgbClr val="6E7990"/>
-                </a:solidFill>
-                <a:latin typeface="Calibri" pitchFamily="34" charset="0"/>
-                <a:ea typeface="Calibri" pitchFamily="34" charset="-122"/>
-                <a:cs typeface="Calibri" pitchFamily="34" charset="-120"/>
-              </a:rPr>
-              <a:t>Roadmap dan prioritization dari business value, bukan dari hype.</a:t>
-            </a:r>
-            <a:endParaRPr lang="en-US" sz="1200" dirty="0"/>
-          </a:p>
-        </p:txBody>
-      </p:sp>
-      <p:sp>
-        <p:nvSpPr>
-          <p:cNvPr id="12" name="Text 9"/>
-          <p:cNvSpPr/>
-          <p:nvPr/>
-        </p:nvSpPr>
-        <p:spPr>
-          <a:xfrm>
-            <a:off x="548640" y="3566160"/>
-            <a:ext cx="822960" cy="1005840"/>
-          </a:xfrm>
-          <a:prstGeom prst="rect">
-            <a:avLst/>
-          </a:prstGeom>
-          <a:noFill/>
-          <a:ln/>
-        </p:spPr>
-        <p:txBody>
-          <a:bodyPr wrap="square" rtlCol="0" anchor="t"/>
-          <a:lstStyle/>
-          <a:p>
-            <a:pPr indent="0" marL="0">
-              <a:buNone/>
-            </a:pPr>
-            <a:r>
-              <a:rPr lang="en-US" sz="2200" b="1" dirty="0">
-                <a:solidFill>
-                  <a:srgbClr val="2563EB"/>
-                </a:solidFill>
-                <a:latin typeface="Calibri" pitchFamily="34" charset="0"/>
-                <a:ea typeface="Calibri" pitchFamily="34" charset="-122"/>
-                <a:cs typeface="Calibri" pitchFamily="34" charset="-120"/>
-              </a:rPr>
-              <a:t>02</a:t>
-            </a:r>
-            <a:endParaRPr lang="en-US" sz="2200" dirty="0"/>
-          </a:p>
-        </p:txBody>
-      </p:sp>
-      <p:sp>
-        <p:nvSpPr>
-          <p:cNvPr id="13" name="Text 10"/>
-          <p:cNvSpPr/>
-          <p:nvPr/>
-        </p:nvSpPr>
-        <p:spPr>
-          <a:xfrm>
-            <a:off x="1463040" y="3566160"/>
-            <a:ext cx="10180015" cy="365760"/>
-          </a:xfrm>
-          <a:prstGeom prst="rect">
-            <a:avLst/>
-          </a:prstGeom>
-          <a:noFill/>
-          <a:ln/>
-        </p:spPr>
-        <p:txBody>
-          <a:bodyPr wrap="square" rtlCol="0" anchor="t"/>
-          <a:lstStyle/>
-          <a:p>
-            <a:pPr indent="0" marL="0">
-              <a:buNone/>
-            </a:pPr>
-            <a:r>
-              <a:rPr lang="en-US" sz="1600" b="1" dirty="0">
-                <a:solidFill>
-                  <a:srgbClr val="141B2E"/>
-                </a:solidFill>
-                <a:latin typeface="Calibri" pitchFamily="34" charset="0"/>
-                <a:ea typeface="Calibri" pitchFamily="34" charset="-122"/>
-                <a:cs typeface="Calibri" pitchFamily="34" charset="-120"/>
-              </a:rPr>
-              <a:t>Custom AI Build</a:t>
-            </a:r>
-            <a:endParaRPr lang="en-US" sz="1600" dirty="0"/>
-          </a:p>
-        </p:txBody>
-      </p:sp>
-      <p:sp>
-        <p:nvSpPr>
-          <p:cNvPr id="14" name="Text 11"/>
-          <p:cNvSpPr/>
-          <p:nvPr/>
-        </p:nvSpPr>
-        <p:spPr>
-          <a:xfrm>
-            <a:off x="1463040" y="3931920"/>
-            <a:ext cx="10180015" cy="548640"/>
-          </a:xfrm>
-          <a:prstGeom prst="rect">
-            <a:avLst/>
-          </a:prstGeom>
-          <a:noFill/>
-          <a:ln/>
-        </p:spPr>
-        <p:txBody>
-          <a:bodyPr wrap="square" rtlCol="0" anchor="t"/>
-          <a:lstStyle/>
-          <a:p>
-            <a:pPr indent="0" marL="0">
-              <a:buNone/>
-            </a:pPr>
-            <a:r>
-              <a:rPr lang="en-US" sz="1200" dirty="0">
-                <a:solidFill>
-                  <a:srgbClr val="6E7990"/>
-                </a:solidFill>
-                <a:latin typeface="Calibri" pitchFamily="34" charset="0"/>
-                <a:ea typeface="Calibri" pitchFamily="34" charset="-122"/>
-                <a:cs typeface="Calibri" pitchFamily="34" charset="-120"/>
-              </a:rPr>
-              <a:t>Custom LLM, agent, RAG — dirancang untuk workflow Anda.</a:t>
-            </a:r>
-            <a:endParaRPr lang="en-US" sz="1200" dirty="0"/>
-          </a:p>
-        </p:txBody>
-      </p:sp>
-      <p:sp>
-        <p:nvSpPr>
-          <p:cNvPr id="15" name="Text 12"/>
-          <p:cNvSpPr/>
-          <p:nvPr/>
-        </p:nvSpPr>
-        <p:spPr>
-          <a:xfrm>
-            <a:off x="548640" y="4572000"/>
-            <a:ext cx="822960" cy="1005840"/>
-          </a:xfrm>
-          <a:prstGeom prst="rect">
-            <a:avLst/>
-          </a:prstGeom>
-          <a:noFill/>
-          <a:ln/>
-        </p:spPr>
-        <p:txBody>
-          <a:bodyPr wrap="square" rtlCol="0" anchor="t"/>
-          <a:lstStyle/>
-          <a:p>
-            <a:pPr indent="0" marL="0">
-              <a:buNone/>
-            </a:pPr>
-            <a:r>
-              <a:rPr lang="en-US" sz="2200" b="1" dirty="0">
-                <a:solidFill>
-                  <a:srgbClr val="2563EB"/>
-                </a:solidFill>
-                <a:latin typeface="Calibri" pitchFamily="34" charset="0"/>
-                <a:ea typeface="Calibri" pitchFamily="34" charset="-122"/>
-                <a:cs typeface="Calibri" pitchFamily="34" charset="-120"/>
-              </a:rPr>
-              <a:t>03</a:t>
-            </a:r>
-            <a:endParaRPr lang="en-US" sz="2200" dirty="0"/>
-          </a:p>
-        </p:txBody>
-      </p:sp>
-      <p:sp>
-        <p:nvSpPr>
-          <p:cNvPr id="16" name="Text 13"/>
-          <p:cNvSpPr/>
-          <p:nvPr/>
-        </p:nvSpPr>
-        <p:spPr>
-          <a:xfrm>
-            <a:off x="1463040" y="4572000"/>
-            <a:ext cx="10180015" cy="365760"/>
-          </a:xfrm>
-          <a:prstGeom prst="rect">
-            <a:avLst/>
-          </a:prstGeom>
-          <a:noFill/>
-          <a:ln/>
-        </p:spPr>
-        <p:txBody>
-          <a:bodyPr wrap="square" rtlCol="0" anchor="t"/>
-          <a:lstStyle/>
-          <a:p>
-            <a:pPr indent="0" marL="0">
-              <a:buNone/>
-            </a:pPr>
-            <a:r>
-              <a:rPr lang="en-US" sz="1600" b="1" dirty="0">
-                <a:solidFill>
-                  <a:srgbClr val="141B2E"/>
-                </a:solidFill>
-                <a:latin typeface="Calibri" pitchFamily="34" charset="0"/>
-                <a:ea typeface="Calibri" pitchFamily="34" charset="-122"/>
-                <a:cs typeface="Calibri" pitchFamily="34" charset="-120"/>
-              </a:rPr>
-              <a:t>Enablement</a:t>
-            </a:r>
-            <a:endParaRPr lang="en-US" sz="1600" dirty="0"/>
-          </a:p>
-        </p:txBody>
-      </p:sp>
-      <p:sp>
-        <p:nvSpPr>
-          <p:cNvPr id="17" name="Text 14"/>
-          <p:cNvSpPr/>
-          <p:nvPr/>
-        </p:nvSpPr>
-        <p:spPr>
-          <a:xfrm>
-            <a:off x="1463040" y="4937760"/>
-            <a:ext cx="10180015" cy="548640"/>
-          </a:xfrm>
-          <a:prstGeom prst="rect">
-            <a:avLst/>
-          </a:prstGeom>
-          <a:noFill/>
-          <a:ln/>
-        </p:spPr>
-        <p:txBody>
-          <a:bodyPr wrap="square" rtlCol="0" anchor="t"/>
-          <a:lstStyle/>
-          <a:p>
-            <a:pPr indent="0" marL="0">
-              <a:buNone/>
-            </a:pPr>
-            <a:r>
-              <a:rPr lang="en-US" sz="1200" dirty="0">
-                <a:solidFill>
-                  <a:srgbClr val="6E7990"/>
-                </a:solidFill>
-                <a:latin typeface="Calibri" pitchFamily="34" charset="0"/>
-                <a:ea typeface="Calibri" pitchFamily="34" charset="-122"/>
-                <a:cs typeface="Calibri" pitchFamily="34" charset="-120"/>
-              </a:rPr>
-              <a:t>Tim internal Anda jadi mandiri — bukan ketergantungan vendor.</a:t>
-            </a:r>
-            <a:endParaRPr lang="en-US" sz="1200" dirty="0"/>
-          </a:p>
-        </p:txBody>
-      </p:sp>
     </p:spTree>
   </p:cSld>
   <p:clrMapOvr>
@@ -2436,7 +1864,7 @@
                 <a:ea typeface="Calibri" pitchFamily="34" charset="-122"/>
                 <a:cs typeface="Calibri" pitchFamily="34" charset="-120"/>
               </a:rPr>
-              <a:t>Mari berkolaborasi untuk transformasi AI bisnis Anda.</a:t>
+              <a:t>Mari mulai transformasi AI Anda.</a:t>
             </a:r>
             <a:endParaRPr lang="en-US" sz="1600" dirty="0"/>
           </a:p>
